--- a/docs/Slides_TG_test_user_introduction.pptx
+++ b/docs/Slides_TG_test_user_introduction.pptx
@@ -6914,7 +6914,7 @@
         <p:spPr/>
         <p:txBody>
           <a:bodyPr>
-            <a:normAutofit fontScale="92500" lnSpcReduction="10000"/>
+            <a:normAutofit fontScale="92500" lnSpcReduction="20000"/>
           </a:bodyPr>
           <a:lstStyle/>
           <a:p>
@@ -6941,7 +6941,14 @@
             <a:pPr lvl="1"/>
             <a:r>
               <a:rPr lang="en-US"/>
-              <a:t>Tool is 95% functional (but some bugs to be expected)</a:t>
+              <a:t>Tool is 95% functional </a:t>
+            </a:r>
+          </a:p>
+          <a:p>
+            <a:pPr lvl="2"/>
+            <a:r>
+              <a:rPr lang="en-US"/>
+              <a:t>(but some bugs to be expected. Performance is slow. Sample limited)</a:t>
             </a:r>
           </a:p>
           <a:p>
@@ -9182,8 +9189,27 @@
               <a:buNone/>
             </a:pPr>
             <a:r>
-              <a:t>Source population, REF and CF</a:t>
-            </a:r>
+              <a:t>Source population</a:t>
+            </a:r>
+            <a:r>
+              <a:rPr lang="en-US"/>
+              <a:t> =&gt;</a:t>
+            </a:r>
+            <a:r>
+              <a:t> REF </a:t>
+            </a:r>
+            <a:r>
+              <a:rPr lang="en-US"/>
+              <a:t>=&gt;</a:t>
+            </a:r>
+            <a:r>
+              <a:t> CF</a:t>
+            </a:r>
+            <a:r>
+              <a:rPr lang="en-US"/>
+              <a:t> &lt;- intervention</a:t>
+            </a:r>
+            <a:endParaRPr/>
           </a:p>
         </p:txBody>
       </p:sp>
@@ -9203,7 +9229,7 @@
         </p:blipFill>
         <p:spPr bwMode="auto">
           <a:xfrm>
-            <a:off x="1181100" y="1193800"/>
+            <a:off x="1181100" y="1664065"/>
             <a:ext cx="6781800" cy="3390900"/>
           </a:xfrm>
           <a:prstGeom prst="rect">
@@ -9217,6 +9243,41 @@
           </a:ln>
         </p:spPr>
       </p:pic>
+      <p:sp>
+        <p:nvSpPr>
+          <p:cNvPr id="8" name="TextBox 7">
+            <a:extLst>
+              <a:ext uri="{FF2B5EF4-FFF2-40B4-BE49-F238E27FC236}">
+                <a16:creationId xmlns:a16="http://schemas.microsoft.com/office/drawing/2014/main" id="{AC40247D-D0A0-D0D4-7B1F-4D81E573192B}"/>
+              </a:ext>
+            </a:extLst>
+          </p:cNvPr>
+          <p:cNvSpPr txBox="1"/>
+          <p:nvPr/>
+        </p:nvSpPr>
+        <p:spPr>
+          <a:xfrm>
+            <a:off x="300446" y="1063229"/>
+            <a:ext cx="8543108" cy="369332"/>
+          </a:xfrm>
+          <a:prstGeom prst="rect">
+            <a:avLst/>
+          </a:prstGeom>
+          <a:noFill/>
+        </p:spPr>
+        <p:txBody>
+          <a:bodyPr wrap="square" rtlCol="0">
+            <a:spAutoFit/>
+          </a:bodyPr>
+          <a:lstStyle/>
+          <a:p>
+            <a:r>
+              <a:rPr lang="en-US"/>
+              <a:t>With the tool we collect information to sample REF and CF</a:t>
+            </a:r>
+          </a:p>
+        </p:txBody>
+      </p:sp>
     </p:spTree>
     <p:extLst>
       <p:ext uri="{BB962C8B-B14F-4D97-AF65-F5344CB8AC3E}">
